--- a/dist/초1/수학/시간과규칙/초1_수학_시간과규칙_02_규칙찾기.pptx
+++ b/dist/초1/수학/시간과규칙/초1_수학_시간과규칙_02_규칙찾기.pptx
@@ -121,13 +121,13 @@
   <p:extLst>
     <p:ext uri="{521415D9-36F7-43E2-AB2F-B90AF26B5E84}">
       <p14:sectionLst xmlns:p14="http://schemas.microsoft.com/office/powerpoint/2010/main">
-        <p14:section name="도입" id="{a634c4ef-dcfc-8c7f-dca2-51cbc9dfb494}">
+        <p14:section name="도입" id="{644fe881-c009-ae43-bc00-8471a228e938}">
           <p14:sldIdLst>
             <p14:sldId id="256"/>
             <p14:sldId id="257"/>
           </p14:sldIdLst>
         </p14:section>
-        <p14:section name="개념" id="{eb99ef78-c6be-e3d8-8eab-1479739c7e9e}">
+        <p14:section name="개념" id="{78d8909e-f2a0-f393-513c-3bedf727403c}">
           <p14:sldIdLst>
             <p14:sldId id="258"/>
             <p14:sldId id="259"/>
@@ -135,7 +135,7 @@
             <p14:sldId id="263"/>
           </p14:sldIdLst>
         </p14:section>
-        <p14:section name="연습" id="{e15f475f-0371-1996-8072-5d840ce1fcf1}">
+        <p14:section name="연습" id="{fcf308d3-2ba8-b323-c2c1-5b23c05e4190}">
           <p14:sldIdLst>
             <p14:sldId id="261"/>
             <p14:sldId id="262"/>
@@ -143,25 +143,25 @@
             <p14:sldId id="265"/>
           </p14:sldIdLst>
         </p14:section>
-        <p14:section name="개념" id="{b9c1b69f-aa42-5887-3424-d55414af6093}">
+        <p14:section name="개념" id="{85eed73d-e227-183a-585a-b09c828f6d18}">
           <p14:sldIdLst/>
         </p14:section>
-        <p14:section name="연습" id="{98441b1f-88a1-825b-154d-5160371ffc21}">
+        <p14:section name="연습" id="{71221a16-2c93-b328-dbc9-37c59a100a4c}">
           <p14:sldIdLst/>
         </p14:section>
-        <p14:section name="확인" id="{b20b2aa2-bd3e-12b5-c4bb-c1408b516fa2}">
+        <p14:section name="확인" id="{1bbabcba-276a-41c4-bfae-b5776f3477cf}">
           <p14:sldIdLst>
             <p14:sldId id="266"/>
             <p14:sldId id="267"/>
             <p14:sldId id="268"/>
           </p14:sldIdLst>
         </p14:section>
-        <p14:section name="정리" id="{18277649-dba0-09e3-7a6d-35a73f761d74}">
+        <p14:section name="정리" id="{c17dfd12-429c-7fcb-bb1f-bf6ded1fe474}">
           <p14:sldIdLst>
             <p14:sldId id="269"/>
           </p14:sldIdLst>
         </p14:section>
-        <p14:section name="보충" id="{a5c2ce9b-1e34-ab8a-1610-833bff47992a}">
+        <p14:section name="보충" id="{b682d5ab-2dad-f0e5-c62c-719ce5a45fe3}">
           <p14:sldIdLst>
             <p14:sldId id="270"/>
           </p14:sldIdLst>

--- a/dist/초1/수학/시간과규칙/초1_수학_시간과규칙_02_규칙찾기.pptx
+++ b/dist/초1/수학/시간과규칙/초1_수학_시간과규칙_02_규칙찾기.pptx
@@ -121,13 +121,13 @@
   <p:extLst>
     <p:ext uri="{521415D9-36F7-43E2-AB2F-B90AF26B5E84}">
       <p14:sectionLst xmlns:p14="http://schemas.microsoft.com/office/powerpoint/2010/main">
-        <p14:section name="도입" id="{644fe881-c009-ae43-bc00-8471a228e938}">
+        <p14:section name="도입" id="{9953c85e-cb6a-3f0d-468d-a572e57a9706}">
           <p14:sldIdLst>
             <p14:sldId id="256"/>
             <p14:sldId id="257"/>
           </p14:sldIdLst>
         </p14:section>
-        <p14:section name="개념" id="{78d8909e-f2a0-f393-513c-3bedf727403c}">
+        <p14:section name="개념" id="{80a24713-608c-b51d-aa33-9ebbdf095d2d}">
           <p14:sldIdLst>
             <p14:sldId id="258"/>
             <p14:sldId id="259"/>
@@ -135,7 +135,7 @@
             <p14:sldId id="263"/>
           </p14:sldIdLst>
         </p14:section>
-        <p14:section name="연습" id="{fcf308d3-2ba8-b323-c2c1-5b23c05e4190}">
+        <p14:section name="연습" id="{952fddc8-ab3d-5511-2289-f29b63447472}">
           <p14:sldIdLst>
             <p14:sldId id="261"/>
             <p14:sldId id="262"/>
@@ -143,25 +143,25 @@
             <p14:sldId id="265"/>
           </p14:sldIdLst>
         </p14:section>
-        <p14:section name="개념" id="{85eed73d-e227-183a-585a-b09c828f6d18}">
+        <p14:section name="개념" id="{a604e819-c4b5-395c-fcbe-238b7eddf792}">
           <p14:sldIdLst/>
         </p14:section>
-        <p14:section name="연습" id="{71221a16-2c93-b328-dbc9-37c59a100a4c}">
+        <p14:section name="연습" id="{ba1123a5-c11e-70d1-aed3-6a40fb2f6ca8}">
           <p14:sldIdLst/>
         </p14:section>
-        <p14:section name="확인" id="{1bbabcba-276a-41c4-bfae-b5776f3477cf}">
+        <p14:section name="확인" id="{f17b00bb-70f3-2187-7005-6a2e95c7a299}">
           <p14:sldIdLst>
             <p14:sldId id="266"/>
             <p14:sldId id="267"/>
             <p14:sldId id="268"/>
           </p14:sldIdLst>
         </p14:section>
-        <p14:section name="정리" id="{c17dfd12-429c-7fcb-bb1f-bf6ded1fe474}">
+        <p14:section name="정리" id="{11c9e8ae-2654-0d6a-61b3-39225b2bda70}">
           <p14:sldIdLst>
             <p14:sldId id="269"/>
           </p14:sldIdLst>
         </p14:section>
-        <p14:section name="보충" id="{b682d5ab-2dad-f0e5-c62c-719ce5a45fe3}">
+        <p14:section name="보충" id="{d84572fe-ee46-dafc-9e54-89d3c092dc4c}">
           <p14:sldIdLst>
             <p14:sldId id="270"/>
           </p14:sldIdLst>
